--- a/decks/maths-algebra/maths-algebra_ch2_machines-algebra.pptx
+++ b/decks/maths-algebra/maths-algebra_ch2_machines-algebra.pptx
@@ -121,47 +121,47 @@
   <p:extLst>
     <p:ext uri="{521415D9-36F7-43E2-AB2F-B90AF26B5E84}">
       <p14:sectionLst xmlns:p14="http://schemas.microsoft.com/office/powerpoint/2010/main">
-        <p14:section name="Opening" id="{2d450816-1355-969e-cf46-67daad3f0d97}">
+        <p14:section name="Opening" id="{00873c18-2be0-5e8e-fcda-84d5721a27a2}">
           <p14:sldIdLst>
             <p14:sldId id="256"/>
           </p14:sldIdLst>
         </p14:section>
-        <p14:section name="Gate" id="{738fdc03-9d9a-8ecf-87c7-279fc8bd4ec2}">
+        <p14:section name="Gate" id="{ebd17790-aa5e-628e-7222-a2cf503c9532}">
           <p14:sldIdLst>
             <p14:sldId id="257"/>
             <p14:sldId id="258"/>
           </p14:sldIdLst>
         </p14:section>
-        <p14:section name="Pre-teach" id="{bc0ba0c7-cf9a-c479-f4c2-fff20c1e9f8f}">
+        <p14:section name="Pre-teach" id="{36274333-5b6e-6ff8-2b34-be5d8e715593}">
           <p14:sldIdLst>
             <p14:sldId id="259"/>
           </p14:sldIdLst>
         </p14:section>
-        <p14:section name="Read-along" id="{635d7de6-fbb3-2162-adde-c5abcd52f084}">
+        <p14:section name="Read-along" id="{a376ebb8-458a-e0a6-ab24-31a6fc957c4b}">
           <p14:sldIdLst>
             <p14:sldId id="260"/>
             <p14:sldId id="261"/>
           </p14:sldIdLst>
         </p14:section>
-        <p14:section name="Teach" id="{360e5483-be15-6401-1770-cec9e272b8bc}">
+        <p14:section name="Teach" id="{60bf98cf-4b0b-711f-166f-482bc3899d33}">
           <p14:sldIdLst>
             <p14:sldId id="262"/>
             <p14:sldId id="263"/>
             <p14:sldId id="264"/>
           </p14:sldIdLst>
         </p14:section>
-        <p14:section name="Routes" id="{381a5888-882b-6283-fd29-54a0ac0c4123}">
+        <p14:section name="Routes" id="{2d1972a0-4114-8514-092b-794f6407dbbd}">
           <p14:sldIdLst>
             <p14:sldId id="265"/>
             <p14:sldId id="266"/>
           </p14:sldIdLst>
         </p14:section>
-        <p14:section name="Close" id="{cbdc5fab-1ca7-96ee-6076-984c4bcbc189}">
+        <p14:section name="Close" id="{b47c836b-567b-4c98-44bc-e71ea8e6ace5}">
           <p14:sldIdLst>
             <p14:sldId id="267"/>
           </p14:sldIdLst>
         </p14:section>
-        <p14:section name="Answers" id="{240562cf-a14d-297d-01df-208e005df95d}">
+        <p14:section name="Answers" id="{3c98be2f-0674-7c72-28a4-b026658254ad}">
           <p14:sldIdLst>
             <p14:sldId id="268"/>
             <p14:sldId id="269"/>
@@ -853,7 +853,7 @@
               <a:rPr lang="en-US" dirty="0"/>
               <a:t>Exit ticket — individual, silent, on a slip or mini-whiteboard. Recall before help: no notes, no lanes, no hints. Collect before pupils leave.
 Question: A machine multiplies by 3. The input is 2a. What is the output?
-Answer: A   6a. Multiply the numbers: 2 × 3 = 6. The output is 6a.
+Answer: B   6a. Multiply the numbers: 2 × 3 = 6. The output is 6a.
 Source of this question: gate item 1 re-asked (options rotated) — this chapter has no third quick-check module.
 The ebook also holds task 3, "Find the function", for homework or the next lesson's do now.
 Sort the slips: correct → ready to move on; incorrect → start next lesson in the pre-teach group, with the read-along and the Support lane. Same destination next time.</a:t>
@@ -945,7 +945,7 @@
             <a:r>
               <a:rPr lang="en-US" dirty="0"/>
               <a:t>Answers — task 1: Multiply an expression. Reveal the answer; pupils mark their own work in a different colour, then read the "why" together. Same destination for every lane, so one answer serves the whole class.
-Answer: C   8b + 28
+Answer: D   8b + 28
 Why: Both terms are multiplied by 4: 2 × 4 = 8 and 7 × 4 = 28, so the output is 8b + 28.
 Ask a Support pupil to explain one step, and a Stretch pupil to share their extension.</a:t>
             </a:r>
@@ -1036,7 +1036,7 @@
             <a:r>
               <a:rPr lang="en-US" dirty="0"/>
               <a:t>Answers — task 2: Divide an expression. Reveal the answer; pupils mark their own work in a different colour, then read the "why" together. Same destination for every lane, so one answer serves the whole class.
-Answer: B   2h − 3
+Answer: D   2h − 3
 Why: Each term is divided by 6: 12 ÷ 6 = 2 and 18 ÷ 6 = 3, so the output is 2h − 3.
 Ask a Support pupil to explain one step, and a Stretch pupil to share their extension.</a:t>
             </a:r>
@@ -1127,7 +1127,7 @@
             <a:r>
               <a:rPr lang="en-US" dirty="0"/>
               <a:t>Answers — exit ticket: Exit ticket. Reveal the answer; pupils mark their own work in a different colour, then read the "why" together. Same destination for every lane, so one answer serves the whole class.
-Answer: A   6a
+Answer: B   6a
 Why: Multiply the numbers: 2 × 3 = 6. The output is 6a.
 Ask a Support pupil to explain one step, and a Stretch pupil to share their extension.</a:t>
             </a:r>
@@ -1218,7 +1218,7 @@
             <a:r>
               <a:rPr lang="en-US" dirty="0"/>
               <a:t>Do now — retrieval. Silent, no notes, no help: recall comes before any support. Give about four minutes.
-1. A machine multiplies by 3. The input is 2a. What is the output?  →  B   6a
+1. A machine multiplies by 3. The input is 2a. What is the output?  →  C   6a
 2. A machine subtracts 4. The input is 4y. What is the output?  →  B   4y − 4
 3. The input is 9 and the output is 27. The function could be multiply by ___.  →  3
 Circulate: who gets 3/3 (Stretch route), 2/3 (Core), 0–1 (Support)? Use this to route pupils later in the lesson.</a:t>
@@ -1310,7 +1310,7 @@
             <a:r>
               <a:rPr lang="en-US" dirty="0"/>
               <a:t>Answers — pupils mark their own in a different colour, then hands up for 3/3, 2/3, 1/3.
-1. B   6a. Multiply the numbers: 2 × 3 = 6. The output is 6a.
+1. C   6a. Multiply the numbers: 2 × 3 = 6. The output is 6a.
 2. B   4y − 4. Taking 4 away from 4y gives 4y − 4. The y term does not change.
 3. 3. 9 × 3 = 27, so the function could be multiply by 3. It could also be add 18.
 Say the route each score points to: 3/3 Stretch, 2/3 Core, 0–1 Support. Pupils may choose to move up.</a:t>
@@ -3832,6 +3832,34 @@
                 <a:ea typeface="Calibri" pitchFamily="34" charset="-122"/>
                 <a:cs typeface="Calibri" pitchFamily="34" charset="-120"/>
               </a:rPr>
+              <a:t>2b + 28      </a:t>
+            </a:r>
+            <a:pPr algn="ctr" indent="0" marL="0">
+              <a:buNone/>
+            </a:pPr>
+            <a:r>
+              <a:rPr lang="en-US" sz="1800" b="1" dirty="0">
+                <a:solidFill>
+                  <a:srgbClr val="B8862B"/>
+                </a:solidFill>
+                <a:latin typeface="Calibri" pitchFamily="34" charset="0"/>
+                <a:ea typeface="Calibri" pitchFamily="34" charset="-122"/>
+                <a:cs typeface="Calibri" pitchFamily="34" charset="-120"/>
+              </a:rPr>
+              <a:t>B  </a:t>
+            </a:r>
+            <a:pPr algn="ctr" indent="0" marL="0">
+              <a:buNone/>
+            </a:pPr>
+            <a:r>
+              <a:rPr lang="en-US" sz="1800" dirty="0">
+                <a:solidFill>
+                  <a:srgbClr val="1E2229"/>
+                </a:solidFill>
+                <a:latin typeface="Calibri" pitchFamily="34" charset="0"/>
+                <a:ea typeface="Calibri" pitchFamily="34" charset="-122"/>
+                <a:cs typeface="Calibri" pitchFamily="34" charset="-120"/>
+              </a:rPr>
               <a:t>8b + 7      </a:t>
             </a:r>
             <a:pPr algn="ctr" indent="0" marL="0">
@@ -3846,7 +3874,7 @@
                 <a:ea typeface="Calibri" pitchFamily="34" charset="-122"/>
                 <a:cs typeface="Calibri" pitchFamily="34" charset="-120"/>
               </a:rPr>
-              <a:t>B  </a:t>
+              <a:t>C  </a:t>
             </a:r>
             <a:pPr algn="ctr" indent="0" marL="0">
               <a:buNone/>
@@ -3860,7 +3888,7 @@
                 <a:ea typeface="Calibri" pitchFamily="34" charset="-122"/>
                 <a:cs typeface="Calibri" pitchFamily="34" charset="-120"/>
               </a:rPr>
-              <a:t>2b + 28      </a:t>
+              <a:t>2b + 11      </a:t>
             </a:r>
             <a:pPr algn="ctr" indent="0" marL="0">
               <a:buNone/>
@@ -3874,7 +3902,7 @@
                 <a:ea typeface="Calibri" pitchFamily="34" charset="-122"/>
                 <a:cs typeface="Calibri" pitchFamily="34" charset="-120"/>
               </a:rPr>
-              <a:t>C  </a:t>
+              <a:t>D  </a:t>
             </a:r>
             <a:pPr algn="ctr" indent="0" marL="0">
               <a:buNone/>
@@ -3888,35 +3916,7 @@
                 <a:ea typeface="Calibri" pitchFamily="34" charset="-122"/>
                 <a:cs typeface="Calibri" pitchFamily="34" charset="-120"/>
               </a:rPr>
-              <a:t>8b + 28      </a:t>
-            </a:r>
-            <a:pPr algn="ctr" indent="0" marL="0">
-              <a:buNone/>
-            </a:pPr>
-            <a:r>
-              <a:rPr lang="en-US" sz="1800" b="1" dirty="0">
-                <a:solidFill>
-                  <a:srgbClr val="B8862B"/>
-                </a:solidFill>
-                <a:latin typeface="Calibri" pitchFamily="34" charset="0"/>
-                <a:ea typeface="Calibri" pitchFamily="34" charset="-122"/>
-                <a:cs typeface="Calibri" pitchFamily="34" charset="-120"/>
-              </a:rPr>
-              <a:t>D  </a:t>
-            </a:r>
-            <a:pPr algn="ctr" indent="0" marL="0">
-              <a:buNone/>
-            </a:pPr>
-            <a:r>
-              <a:rPr lang="en-US" sz="1800" dirty="0">
-                <a:solidFill>
-                  <a:srgbClr val="1E2229"/>
-                </a:solidFill>
-                <a:latin typeface="Calibri" pitchFamily="34" charset="0"/>
-                <a:ea typeface="Calibri" pitchFamily="34" charset="-122"/>
-                <a:cs typeface="Calibri" pitchFamily="34" charset="-120"/>
-              </a:rPr>
-              <a:t>2b + 11</a:t>
+              <a:t>8b + 28</a:t>
             </a:r>
             <a:endParaRPr lang="en-US" sz="2000" dirty="0"/>
           </a:p>
@@ -5003,7 +5003,7 @@
                 <a:ea typeface="Calibri" pitchFamily="34" charset="-122"/>
                 <a:cs typeface="Calibri" pitchFamily="34" charset="-120"/>
               </a:rPr>
-              <a:t>2h − 3      </a:t>
+              <a:t>12h − 3      </a:t>
             </a:r>
             <a:pPr algn="ctr" indent="0" marL="0">
               <a:buNone/>
@@ -5031,7 +5031,7 @@
                 <a:ea typeface="Calibri" pitchFamily="34" charset="-122"/>
                 <a:cs typeface="Calibri" pitchFamily="34" charset="-120"/>
               </a:rPr>
-              <a:t>12h − 3      </a:t>
+              <a:t>6h − 12      </a:t>
             </a:r>
             <a:pPr algn="ctr" indent="0" marL="0">
               <a:buNone/>
@@ -5059,7 +5059,7 @@
                 <a:ea typeface="Calibri" pitchFamily="34" charset="-122"/>
                 <a:cs typeface="Calibri" pitchFamily="34" charset="-120"/>
               </a:rPr>
-              <a:t>6h − 12</a:t>
+              <a:t>2h − 3</a:t>
             </a:r>
             <a:endParaRPr lang="en-US" sz="2000" dirty="0"/>
           </a:p>
@@ -6086,7 +6086,7 @@
                 <a:ea typeface="Calibri" pitchFamily="34" charset="-122"/>
                 <a:cs typeface="Calibri" pitchFamily="34" charset="-120"/>
               </a:rPr>
-              <a:t>6a</a:t>
+              <a:t>5a</a:t>
             </a:r>
             <a:endParaRPr lang="en-US" sz="2400" dirty="0"/>
           </a:p>
@@ -6123,7 +6123,7 @@
                 <a:ea typeface="Calibri" pitchFamily="34" charset="-122"/>
                 <a:cs typeface="Calibri" pitchFamily="34" charset="-120"/>
               </a:rPr>
-              <a:t>2a + 3</a:t>
+              <a:t>6a</a:t>
             </a:r>
             <a:endParaRPr lang="en-US" sz="2400" dirty="0"/>
           </a:p>
@@ -6197,7 +6197,7 @@
                 <a:ea typeface="Calibri" pitchFamily="34" charset="-122"/>
                 <a:cs typeface="Calibri" pitchFamily="34" charset="-120"/>
               </a:rPr>
-              <a:t>5a</a:t>
+              <a:t>2a + 3</a:t>
             </a:r>
             <a:endParaRPr lang="en-US" sz="2400" dirty="0"/>
           </a:p>
@@ -6602,7 +6602,7 @@
                 <a:ea typeface="Cambria" pitchFamily="34" charset="-122"/>
                 <a:cs typeface="Cambria" pitchFamily="34" charset="-120"/>
               </a:rPr>
-              <a:t>C   8b + 28</a:t>
+              <a:t>D   8b + 28</a:t>
             </a:r>
             <a:endParaRPr lang="en-US" sz="1800" dirty="0"/>
           </a:p>
@@ -7061,7 +7061,7 @@
                 <a:ea typeface="Cambria" pitchFamily="34" charset="-122"/>
                 <a:cs typeface="Cambria" pitchFamily="34" charset="-120"/>
               </a:rPr>
-              <a:t>B   2h − 3</a:t>
+              <a:t>D   2h − 3</a:t>
             </a:r>
             <a:endParaRPr lang="en-US" sz="1800" dirty="0"/>
           </a:p>
@@ -7520,7 +7520,7 @@
                 <a:ea typeface="Cambria" pitchFamily="34" charset="-122"/>
                 <a:cs typeface="Cambria" pitchFamily="34" charset="-120"/>
               </a:rPr>
-              <a:t>A   6a</a:t>
+              <a:t>B   6a</a:t>
             </a:r>
             <a:endParaRPr lang="en-US" sz="1800" dirty="0"/>
           </a:p>
@@ -8054,7 +8054,7 @@
                 <a:ea typeface="Calibri" pitchFamily="34" charset="-122"/>
                 <a:cs typeface="Calibri" pitchFamily="34" charset="-120"/>
               </a:rPr>
-              <a:t>5a</a:t>
+              <a:t>2a + 3</a:t>
             </a:r>
             <a:endParaRPr lang="en-US" sz="2400" dirty="0"/>
           </a:p>
@@ -8091,7 +8091,7 @@
                 <a:ea typeface="Calibri" pitchFamily="34" charset="-122"/>
                 <a:cs typeface="Calibri" pitchFamily="34" charset="-120"/>
               </a:rPr>
-              <a:t>6a</a:t>
+              <a:t>5a</a:t>
             </a:r>
             <a:endParaRPr lang="en-US" sz="2400" dirty="0"/>
           </a:p>
@@ -8128,7 +8128,7 @@
                 <a:ea typeface="Calibri" pitchFamily="34" charset="-122"/>
                 <a:cs typeface="Calibri" pitchFamily="34" charset="-120"/>
               </a:rPr>
-              <a:t>2a + 3</a:t>
+              <a:t>6a</a:t>
             </a:r>
             <a:endParaRPr lang="en-US" sz="2400" dirty="0"/>
           </a:p>
@@ -8369,7 +8369,7 @@
                 <a:ea typeface="Calibri" pitchFamily="34" charset="-122"/>
                 <a:cs typeface="Calibri" pitchFamily="34" charset="-120"/>
               </a:rPr>
-              <a:t>y</a:t>
+              <a:t>0</a:t>
             </a:r>
             <a:endParaRPr lang="en-US" sz="2400" dirty="0"/>
           </a:p>
@@ -8443,7 +8443,7 @@
                 <a:ea typeface="Calibri" pitchFamily="34" charset="-122"/>
                 <a:cs typeface="Calibri" pitchFamily="34" charset="-120"/>
               </a:rPr>
-              <a:t>0</a:t>
+              <a:t>4 − 4y</a:t>
             </a:r>
             <a:endParaRPr lang="en-US" sz="2400" dirty="0"/>
           </a:p>
@@ -8480,7 +8480,7 @@
                 <a:ea typeface="Calibri" pitchFamily="34" charset="-122"/>
                 <a:cs typeface="Calibri" pitchFamily="34" charset="-120"/>
               </a:rPr>
-              <a:t>4 − 4y</a:t>
+              <a:t>y</a:t>
             </a:r>
             <a:endParaRPr lang="en-US" sz="2400" dirty="0"/>
           </a:p>
@@ -9079,7 +9079,7 @@
                 <a:ea typeface="Calibri" pitchFamily="34" charset="-122"/>
                 <a:cs typeface="Calibri" pitchFamily="34" charset="-120"/>
               </a:rPr>
-              <a:t>B   6a</a:t>
+              <a:t>C   6a</a:t>
             </a:r>
             <a:endParaRPr lang="en-US" sz="2200" dirty="0"/>
           </a:p>

--- a/decks/maths-algebra/maths-algebra_ch2_machines-algebra.pptx
+++ b/decks/maths-algebra/maths-algebra_ch2_machines-algebra.pptx
@@ -121,47 +121,47 @@
   <p:extLst>
     <p:ext uri="{521415D9-36F7-43E2-AB2F-B90AF26B5E84}">
       <p14:sectionLst xmlns:p14="http://schemas.microsoft.com/office/powerpoint/2010/main">
-        <p14:section name="Opening" id="{00873c18-2be0-5e8e-fcda-84d5721a27a2}">
+        <p14:section name="Opening" id="{5cb57cef-3a4b-5f85-c61a-54c5702154c9}">
           <p14:sldIdLst>
             <p14:sldId id="256"/>
           </p14:sldIdLst>
         </p14:section>
-        <p14:section name="Gate" id="{ebd17790-aa5e-628e-7222-a2cf503c9532}">
+        <p14:section name="Gate" id="{077c5c42-b79b-7dc3-21af-b38ae3ec7b84}">
           <p14:sldIdLst>
             <p14:sldId id="257"/>
             <p14:sldId id="258"/>
           </p14:sldIdLst>
         </p14:section>
-        <p14:section name="Pre-teach" id="{36274333-5b6e-6ff8-2b34-be5d8e715593}">
+        <p14:section name="Pre-teach" id="{140bbf2a-c881-a135-d8b1-10b7956e4e5f}">
           <p14:sldIdLst>
             <p14:sldId id="259"/>
           </p14:sldIdLst>
         </p14:section>
-        <p14:section name="Read-along" id="{a376ebb8-458a-e0a6-ab24-31a6fc957c4b}">
+        <p14:section name="Read-along" id="{4be84546-c987-321d-7580-98498c8b1e65}">
           <p14:sldIdLst>
             <p14:sldId id="260"/>
             <p14:sldId id="261"/>
           </p14:sldIdLst>
         </p14:section>
-        <p14:section name="Teach" id="{60bf98cf-4b0b-711f-166f-482bc3899d33}">
+        <p14:section name="Teach" id="{1fbc2640-6563-8fca-3268-ed2f58c75551}">
           <p14:sldIdLst>
             <p14:sldId id="262"/>
             <p14:sldId id="263"/>
             <p14:sldId id="264"/>
           </p14:sldIdLst>
         </p14:section>
-        <p14:section name="Routes" id="{2d1972a0-4114-8514-092b-794f6407dbbd}">
+        <p14:section name="Routes" id="{e9b61a32-ea5d-025c-82a0-a1a7181bbe14}">
           <p14:sldIdLst>
             <p14:sldId id="265"/>
             <p14:sldId id="266"/>
           </p14:sldIdLst>
         </p14:section>
-        <p14:section name="Close" id="{b47c836b-567b-4c98-44bc-e71ea8e6ace5}">
+        <p14:section name="Close" id="{bf2d0ea4-e823-98de-4e42-b228018539ef}">
           <p14:sldIdLst>
             <p14:sldId id="267"/>
           </p14:sldIdLst>
         </p14:section>
-        <p14:section name="Answers" id="{3c98be2f-0674-7c72-28a4-b026658254ad}">
+        <p14:section name="Answers" id="{86a8aab9-1183-2146-4c61-29ef0d331e30}">
           <p14:sldIdLst>
             <p14:sldId id="268"/>
             <p14:sldId id="269"/>
